--- a/stimuli/feedback/feedback_cards_square.pptx
+++ b/stimuli/feedback/feedback_cards_square.pptx
@@ -9,15 +9,17 @@
     <p:sldId id="296" r:id="rId3"/>
     <p:sldId id="297" r:id="rId4"/>
     <p:sldId id="303" r:id="rId5"/>
-    <p:sldId id="298" r:id="rId6"/>
-    <p:sldId id="304" r:id="rId7"/>
-    <p:sldId id="299" r:id="rId8"/>
-    <p:sldId id="305" r:id="rId9"/>
-    <p:sldId id="307" r:id="rId10"/>
-    <p:sldId id="306" r:id="rId11"/>
-    <p:sldId id="308" r:id="rId12"/>
-    <p:sldId id="294" r:id="rId13"/>
-    <p:sldId id="295" r:id="rId14"/>
+    <p:sldId id="309" r:id="rId6"/>
+    <p:sldId id="298" r:id="rId7"/>
+    <p:sldId id="304" r:id="rId8"/>
+    <p:sldId id="299" r:id="rId9"/>
+    <p:sldId id="305" r:id="rId10"/>
+    <p:sldId id="307" r:id="rId11"/>
+    <p:sldId id="310" r:id="rId12"/>
+    <p:sldId id="306" r:id="rId13"/>
+    <p:sldId id="308" r:id="rId14"/>
+    <p:sldId id="294" r:id="rId15"/>
+    <p:sldId id="295" r:id="rId16"/>
   </p:sldIdLst>
   <p:sldSz cx="2286000" cy="2286000"/>
   <p:notesSz cx="6858000" cy="9144000"/>
@@ -255,7 +257,7 @@
           <a:p>
             <a:fld id="{E9438817-E892-7F40-9070-BDB41E64D921}" type="datetimeFigureOut">
               <a:rPr lang="en-US" smtClean="0"/>
-              <a:t>5/1/26</a:t>
+              <a:t>6/3/26</a:t>
             </a:fld>
             <a:endParaRPr lang="en-US"/>
           </a:p>
@@ -425,7 +427,7 @@
           <a:p>
             <a:fld id="{E9438817-E892-7F40-9070-BDB41E64D921}" type="datetimeFigureOut">
               <a:rPr lang="en-US" smtClean="0"/>
-              <a:t>5/1/26</a:t>
+              <a:t>6/3/26</a:t>
             </a:fld>
             <a:endParaRPr lang="en-US"/>
           </a:p>
@@ -605,7 +607,7 @@
           <a:p>
             <a:fld id="{E9438817-E892-7F40-9070-BDB41E64D921}" type="datetimeFigureOut">
               <a:rPr lang="en-US" smtClean="0"/>
-              <a:t>5/1/26</a:t>
+              <a:t>6/3/26</a:t>
             </a:fld>
             <a:endParaRPr lang="en-US"/>
           </a:p>
@@ -900,7 +902,7 @@
           <a:p>
             <a:fld id="{E9438817-E892-7F40-9070-BDB41E64D921}" type="datetimeFigureOut">
               <a:rPr lang="en-US" smtClean="0"/>
-              <a:t>5/1/26</a:t>
+              <a:t>6/3/26</a:t>
             </a:fld>
             <a:endParaRPr lang="en-US"/>
           </a:p>
@@ -1144,7 +1146,7 @@
           <a:p>
             <a:fld id="{E9438817-E892-7F40-9070-BDB41E64D921}" type="datetimeFigureOut">
               <a:rPr lang="en-US" smtClean="0"/>
-              <a:t>5/1/26</a:t>
+              <a:t>6/3/26</a:t>
             </a:fld>
             <a:endParaRPr lang="en-US"/>
           </a:p>
@@ -1376,7 +1378,7 @@
           <a:p>
             <a:fld id="{E9438817-E892-7F40-9070-BDB41E64D921}" type="datetimeFigureOut">
               <a:rPr lang="en-US" smtClean="0"/>
-              <a:t>5/1/26</a:t>
+              <a:t>6/3/26</a:t>
             </a:fld>
             <a:endParaRPr lang="en-US"/>
           </a:p>
@@ -1743,7 +1745,7 @@
           <a:p>
             <a:fld id="{E9438817-E892-7F40-9070-BDB41E64D921}" type="datetimeFigureOut">
               <a:rPr lang="en-US" smtClean="0"/>
-              <a:t>5/1/26</a:t>
+              <a:t>6/3/26</a:t>
             </a:fld>
             <a:endParaRPr lang="en-US"/>
           </a:p>
@@ -1861,7 +1863,7 @@
           <a:p>
             <a:fld id="{E9438817-E892-7F40-9070-BDB41E64D921}" type="datetimeFigureOut">
               <a:rPr lang="en-US" smtClean="0"/>
-              <a:t>5/1/26</a:t>
+              <a:t>6/3/26</a:t>
             </a:fld>
             <a:endParaRPr lang="en-US"/>
           </a:p>
@@ -1956,7 +1958,7 @@
           <a:p>
             <a:fld id="{E9438817-E892-7F40-9070-BDB41E64D921}" type="datetimeFigureOut">
               <a:rPr lang="en-US" smtClean="0"/>
-              <a:t>5/1/26</a:t>
+              <a:t>6/3/26</a:t>
             </a:fld>
             <a:endParaRPr lang="en-US"/>
           </a:p>
@@ -2233,7 +2235,7 @@
           <a:p>
             <a:fld id="{E9438817-E892-7F40-9070-BDB41E64D921}" type="datetimeFigureOut">
               <a:rPr lang="en-US" smtClean="0"/>
-              <a:t>5/1/26</a:t>
+              <a:t>6/3/26</a:t>
             </a:fld>
             <a:endParaRPr lang="en-US"/>
           </a:p>
@@ -2490,7 +2492,7 @@
           <a:p>
             <a:fld id="{E9438817-E892-7F40-9070-BDB41E64D921}" type="datetimeFigureOut">
               <a:rPr lang="en-US" smtClean="0"/>
-              <a:t>5/1/26</a:t>
+              <a:t>6/3/26</a:t>
             </a:fld>
             <a:endParaRPr lang="en-US"/>
           </a:p>
@@ -2703,7 +2705,7 @@
           <a:p>
             <a:fld id="{E9438817-E892-7F40-9070-BDB41E64D921}" type="datetimeFigureOut">
               <a:rPr lang="en-US" smtClean="0"/>
-              <a:t>5/1/26</a:t>
+              <a:t>6/3/26</a:t>
             </a:fld>
             <a:endParaRPr lang="en-US"/>
           </a:p>
@@ -3421,6 +3423,679 @@
         <p:cNvPr id="1" name="">
           <a:extLst>
             <a:ext uri="{FF2B5EF4-FFF2-40B4-BE49-F238E27FC236}">
+              <a16:creationId xmlns:a16="http://schemas.microsoft.com/office/drawing/2014/main" id="{1274BBB8-7970-4B64-3BDE-97204AB32689}"/>
+            </a:ext>
+          </a:extLst>
+        </p:cNvPr>
+        <p:cNvGrpSpPr/>
+        <p:nvPr/>
+      </p:nvGrpSpPr>
+      <p:grpSpPr>
+        <a:xfrm>
+          <a:off x="0" y="0"/>
+          <a:ext cx="0" cy="0"/>
+          <a:chOff x="0" y="0"/>
+          <a:chExt cx="0" cy="0"/>
+        </a:xfrm>
+      </p:grpSpPr>
+      <p:sp>
+        <p:nvSpPr>
+          <p:cNvPr id="8" name="Rounded Rectangle 7">
+            <a:extLst>
+              <a:ext uri="{FF2B5EF4-FFF2-40B4-BE49-F238E27FC236}">
+                <a16:creationId xmlns:a16="http://schemas.microsoft.com/office/drawing/2014/main" id="{DF42EDC6-FAAF-C800-3DC2-DF4AF38F972C}"/>
+              </a:ext>
+            </a:extLst>
+          </p:cNvPr>
+          <p:cNvSpPr/>
+          <p:nvPr/>
+        </p:nvSpPr>
+        <p:spPr>
+          <a:xfrm>
+            <a:off x="6777" y="0"/>
+            <a:ext cx="2286001" cy="2286000"/>
+          </a:xfrm>
+          <a:prstGeom prst="roundRect">
+            <a:avLst>
+              <a:gd name="adj" fmla="val 640"/>
+            </a:avLst>
+          </a:prstGeom>
+          <a:solidFill>
+            <a:schemeClr val="bg1"/>
+          </a:solidFill>
+          <a:ln w="28575">
+            <a:solidFill>
+              <a:schemeClr val="tx1"/>
+            </a:solidFill>
+          </a:ln>
+        </p:spPr>
+        <p:style>
+          <a:lnRef idx="2">
+            <a:schemeClr val="accent1">
+              <a:shade val="50000"/>
+            </a:schemeClr>
+          </a:lnRef>
+          <a:fillRef idx="1">
+            <a:schemeClr val="accent1"/>
+          </a:fillRef>
+          <a:effectRef idx="0">
+            <a:schemeClr val="accent1"/>
+          </a:effectRef>
+          <a:fontRef idx="minor">
+            <a:schemeClr val="lt1"/>
+          </a:fontRef>
+        </p:style>
+        <p:txBody>
+          <a:bodyPr rtlCol="0" anchor="ctr"/>
+          <a:lstStyle/>
+          <a:p>
+            <a:pPr algn="ctr"/>
+            <a:endParaRPr lang="en-US" sz="471" dirty="0"/>
+          </a:p>
+        </p:txBody>
+      </p:sp>
+      <p:sp>
+        <p:nvSpPr>
+          <p:cNvPr id="5" name="Rounded Rectangle 4">
+            <a:extLst>
+              <a:ext uri="{FF2B5EF4-FFF2-40B4-BE49-F238E27FC236}">
+                <a16:creationId xmlns:a16="http://schemas.microsoft.com/office/drawing/2014/main" id="{43987BB0-B799-CEF1-3E9D-D81D60CB13B7}"/>
+              </a:ext>
+            </a:extLst>
+          </p:cNvPr>
+          <p:cNvSpPr/>
+          <p:nvPr/>
+        </p:nvSpPr>
+        <p:spPr>
+          <a:xfrm>
+            <a:off x="65887" y="59108"/>
+            <a:ext cx="2167781" cy="2167781"/>
+          </a:xfrm>
+          <a:prstGeom prst="roundRect">
+            <a:avLst>
+              <a:gd name="adj" fmla="val 7605"/>
+            </a:avLst>
+          </a:prstGeom>
+          <a:solidFill>
+            <a:schemeClr val="bg2"/>
+          </a:solidFill>
+          <a:ln w="28575">
+            <a:solidFill>
+              <a:schemeClr val="tx1"/>
+            </a:solidFill>
+          </a:ln>
+        </p:spPr>
+        <p:style>
+          <a:lnRef idx="2">
+            <a:schemeClr val="accent1">
+              <a:shade val="15000"/>
+            </a:schemeClr>
+          </a:lnRef>
+          <a:fillRef idx="1">
+            <a:schemeClr val="accent1"/>
+          </a:fillRef>
+          <a:effectRef idx="0">
+            <a:schemeClr val="accent1"/>
+          </a:effectRef>
+          <a:fontRef idx="minor">
+            <a:schemeClr val="lt1"/>
+          </a:fontRef>
+        </p:style>
+        <p:txBody>
+          <a:bodyPr rtlCol="0" anchor="ctr"/>
+          <a:lstStyle/>
+          <a:p>
+            <a:pPr algn="ctr"/>
+            <a:endParaRPr lang="en-US"/>
+          </a:p>
+        </p:txBody>
+      </p:sp>
+      <p:sp>
+        <p:nvSpPr>
+          <p:cNvPr id="10" name="TextBox 9">
+            <a:extLst>
+              <a:ext uri="{FF2B5EF4-FFF2-40B4-BE49-F238E27FC236}">
+                <a16:creationId xmlns:a16="http://schemas.microsoft.com/office/drawing/2014/main" id="{1141178D-7095-866D-DF95-037AAF990B48}"/>
+              </a:ext>
+            </a:extLst>
+          </p:cNvPr>
+          <p:cNvSpPr txBox="1"/>
+          <p:nvPr/>
+        </p:nvSpPr>
+        <p:spPr>
+          <a:xfrm>
+            <a:off x="59403" y="1544177"/>
+            <a:ext cx="1499811" cy="707886"/>
+          </a:xfrm>
+          <a:prstGeom prst="rect">
+            <a:avLst/>
+          </a:prstGeom>
+          <a:noFill/>
+        </p:spPr>
+        <p:txBody>
+          <a:bodyPr wrap="square" rtlCol="0">
+            <a:spAutoFit/>
+          </a:bodyPr>
+          <a:lstStyle/>
+          <a:p>
+            <a:r>
+              <a:rPr lang="en-US" sz="4000" b="1" dirty="0">
+                <a:latin typeface="Arial" charset="0"/>
+                <a:ea typeface="Arial" charset="0"/>
+                <a:cs typeface="Arial" charset="0"/>
+              </a:rPr>
+              <a:t>70¢</a:t>
+            </a:r>
+          </a:p>
+        </p:txBody>
+      </p:sp>
+      <p:sp>
+        <p:nvSpPr>
+          <p:cNvPr id="11" name="Rectangle 10">
+            <a:extLst>
+              <a:ext uri="{FF2B5EF4-FFF2-40B4-BE49-F238E27FC236}">
+                <a16:creationId xmlns:a16="http://schemas.microsoft.com/office/drawing/2014/main" id="{F1741C2E-2981-90C4-17C8-972E7B94BD93}"/>
+              </a:ext>
+            </a:extLst>
+          </p:cNvPr>
+          <p:cNvSpPr/>
+          <p:nvPr/>
+        </p:nvSpPr>
+        <p:spPr>
+          <a:xfrm rot="2703669">
+            <a:off x="668752" y="685155"/>
+            <a:ext cx="962052" cy="915689"/>
+          </a:xfrm>
+          <a:prstGeom prst="rect">
+            <a:avLst/>
+          </a:prstGeom>
+          <a:solidFill>
+            <a:schemeClr val="bg1"/>
+          </a:solidFill>
+          <a:ln>
+            <a:solidFill>
+              <a:schemeClr val="tx1"/>
+            </a:solidFill>
+          </a:ln>
+        </p:spPr>
+        <p:style>
+          <a:lnRef idx="2">
+            <a:schemeClr val="accent1">
+              <a:shade val="50000"/>
+            </a:schemeClr>
+          </a:lnRef>
+          <a:fillRef idx="1">
+            <a:schemeClr val="accent1"/>
+          </a:fillRef>
+          <a:effectRef idx="0">
+            <a:schemeClr val="accent1"/>
+          </a:effectRef>
+          <a:fontRef idx="minor">
+            <a:schemeClr val="lt1"/>
+          </a:fontRef>
+        </p:style>
+        <p:txBody>
+          <a:bodyPr rtlCol="0" anchor="ctr"/>
+          <a:lstStyle/>
+          <a:p>
+            <a:pPr algn="ctr"/>
+            <a:endParaRPr lang="en-US" sz="471"/>
+          </a:p>
+        </p:txBody>
+      </p:sp>
+      <p:sp>
+        <p:nvSpPr>
+          <p:cNvPr id="12" name="TextBox 11">
+            <a:extLst>
+              <a:ext uri="{FF2B5EF4-FFF2-40B4-BE49-F238E27FC236}">
+                <a16:creationId xmlns:a16="http://schemas.microsoft.com/office/drawing/2014/main" id="{5B85D8CD-C49C-28E7-B548-D05632FE3D44}"/>
+              </a:ext>
+            </a:extLst>
+          </p:cNvPr>
+          <p:cNvSpPr txBox="1"/>
+          <p:nvPr/>
+        </p:nvSpPr>
+        <p:spPr>
+          <a:xfrm>
+            <a:off x="485914" y="818366"/>
+            <a:ext cx="1314172" cy="646331"/>
+          </a:xfrm>
+          <a:prstGeom prst="rect">
+            <a:avLst/>
+          </a:prstGeom>
+          <a:noFill/>
+        </p:spPr>
+        <p:txBody>
+          <a:bodyPr wrap="square" rtlCol="0">
+            <a:spAutoFit/>
+          </a:bodyPr>
+          <a:lstStyle/>
+          <a:p>
+            <a:pPr algn="ctr"/>
+            <a:r>
+              <a:rPr lang="en-US" sz="3538" b="1" dirty="0">
+                <a:latin typeface="Arial" charset="0"/>
+                <a:ea typeface="Arial" charset="0"/>
+                <a:cs typeface="Arial" charset="0"/>
+              </a:rPr>
+              <a:t>70</a:t>
+            </a:r>
+            <a:r>
+              <a:rPr lang="en-US" sz="3600" b="1" dirty="0">
+                <a:latin typeface="Arial" charset="0"/>
+                <a:ea typeface="Arial" charset="0"/>
+                <a:cs typeface="Arial" charset="0"/>
+              </a:rPr>
+              <a:t>¢</a:t>
+            </a:r>
+            <a:endParaRPr lang="en-US" sz="3538" b="1" dirty="0">
+              <a:latin typeface="Arial" charset="0"/>
+              <a:ea typeface="Arial" charset="0"/>
+              <a:cs typeface="Arial" charset="0"/>
+            </a:endParaRPr>
+          </a:p>
+        </p:txBody>
+      </p:sp>
+      <p:sp>
+        <p:nvSpPr>
+          <p:cNvPr id="2" name="TextBox 1">
+            <a:extLst>
+              <a:ext uri="{FF2B5EF4-FFF2-40B4-BE49-F238E27FC236}">
+                <a16:creationId xmlns:a16="http://schemas.microsoft.com/office/drawing/2014/main" id="{31B68E59-ECE5-C2A3-BE9F-49AA446BF7F5}"/>
+              </a:ext>
+            </a:extLst>
+          </p:cNvPr>
+          <p:cNvSpPr txBox="1"/>
+          <p:nvPr/>
+        </p:nvSpPr>
+        <p:spPr>
+          <a:xfrm>
+            <a:off x="1226194" y="0"/>
+            <a:ext cx="1217487" cy="707886"/>
+          </a:xfrm>
+          <a:prstGeom prst="rect">
+            <a:avLst/>
+          </a:prstGeom>
+          <a:noFill/>
+        </p:spPr>
+        <p:txBody>
+          <a:bodyPr wrap="square" rtlCol="0">
+            <a:spAutoFit/>
+          </a:bodyPr>
+          <a:lstStyle/>
+          <a:p>
+            <a:r>
+              <a:rPr lang="en-US" sz="4000" b="1" dirty="0">
+                <a:latin typeface="Arial" charset="0"/>
+                <a:ea typeface="Arial" charset="0"/>
+                <a:cs typeface="Arial" charset="0"/>
+              </a:rPr>
+              <a:t>70¢</a:t>
+            </a:r>
+          </a:p>
+        </p:txBody>
+      </p:sp>
+    </p:spTree>
+    <p:extLst>
+      <p:ext uri="{BB962C8B-B14F-4D97-AF65-F5344CB8AC3E}">
+        <p14:creationId xmlns:p14="http://schemas.microsoft.com/office/powerpoint/2010/main" val="2369235828"/>
+      </p:ext>
+    </p:extLst>
+  </p:cSld>
+  <p:clrMapOvr>
+    <a:masterClrMapping/>
+  </p:clrMapOvr>
+  <p:transition spd="med"/>
+</p:sld>
+</file>
+
+<file path=ppt/slides/slide11.xml><?xml version="1.0" encoding="utf-8"?>
+<p:sld xmlns:a="http://schemas.openxmlformats.org/drawingml/2006/main" xmlns:r="http://schemas.openxmlformats.org/officeDocument/2006/relationships" xmlns:p="http://schemas.openxmlformats.org/presentationml/2006/main">
+  <p:cSld>
+    <p:spTree>
+      <p:nvGrpSpPr>
+        <p:cNvPr id="1" name="">
+          <a:extLst>
+            <a:ext uri="{FF2B5EF4-FFF2-40B4-BE49-F238E27FC236}">
+              <a16:creationId xmlns:a16="http://schemas.microsoft.com/office/drawing/2014/main" id="{46ED2504-B5C6-7CB2-312A-80F6BADB7C5D}"/>
+            </a:ext>
+          </a:extLst>
+        </p:cNvPr>
+        <p:cNvGrpSpPr/>
+        <p:nvPr/>
+      </p:nvGrpSpPr>
+      <p:grpSpPr>
+        <a:xfrm>
+          <a:off x="0" y="0"/>
+          <a:ext cx="0" cy="0"/>
+          <a:chOff x="0" y="0"/>
+          <a:chExt cx="0" cy="0"/>
+        </a:xfrm>
+      </p:grpSpPr>
+      <p:sp>
+        <p:nvSpPr>
+          <p:cNvPr id="8" name="Rounded Rectangle 7">
+            <a:extLst>
+              <a:ext uri="{FF2B5EF4-FFF2-40B4-BE49-F238E27FC236}">
+                <a16:creationId xmlns:a16="http://schemas.microsoft.com/office/drawing/2014/main" id="{9753B278-1258-6970-E442-4B37F8EAD99A}"/>
+              </a:ext>
+            </a:extLst>
+          </p:cNvPr>
+          <p:cNvSpPr/>
+          <p:nvPr/>
+        </p:nvSpPr>
+        <p:spPr>
+          <a:xfrm>
+            <a:off x="6777" y="0"/>
+            <a:ext cx="2286001" cy="2286000"/>
+          </a:xfrm>
+          <a:prstGeom prst="roundRect">
+            <a:avLst>
+              <a:gd name="adj" fmla="val 640"/>
+            </a:avLst>
+          </a:prstGeom>
+          <a:solidFill>
+            <a:schemeClr val="bg1"/>
+          </a:solidFill>
+          <a:ln w="28575">
+            <a:solidFill>
+              <a:schemeClr val="tx1"/>
+            </a:solidFill>
+          </a:ln>
+        </p:spPr>
+        <p:style>
+          <a:lnRef idx="2">
+            <a:schemeClr val="accent1">
+              <a:shade val="50000"/>
+            </a:schemeClr>
+          </a:lnRef>
+          <a:fillRef idx="1">
+            <a:schemeClr val="accent1"/>
+          </a:fillRef>
+          <a:effectRef idx="0">
+            <a:schemeClr val="accent1"/>
+          </a:effectRef>
+          <a:fontRef idx="minor">
+            <a:schemeClr val="lt1"/>
+          </a:fontRef>
+        </p:style>
+        <p:txBody>
+          <a:bodyPr rtlCol="0" anchor="ctr"/>
+          <a:lstStyle/>
+          <a:p>
+            <a:pPr algn="ctr"/>
+            <a:endParaRPr lang="en-US" sz="471" dirty="0"/>
+          </a:p>
+        </p:txBody>
+      </p:sp>
+      <p:sp>
+        <p:nvSpPr>
+          <p:cNvPr id="5" name="Rounded Rectangle 4">
+            <a:extLst>
+              <a:ext uri="{FF2B5EF4-FFF2-40B4-BE49-F238E27FC236}">
+                <a16:creationId xmlns:a16="http://schemas.microsoft.com/office/drawing/2014/main" id="{F49F7001-EFE0-E6AD-A3D2-40FA9E5A0B7A}"/>
+              </a:ext>
+            </a:extLst>
+          </p:cNvPr>
+          <p:cNvSpPr/>
+          <p:nvPr/>
+        </p:nvSpPr>
+        <p:spPr>
+          <a:xfrm>
+            <a:off x="65887" y="59108"/>
+            <a:ext cx="2167781" cy="2167781"/>
+          </a:xfrm>
+          <a:prstGeom prst="roundRect">
+            <a:avLst>
+              <a:gd name="adj" fmla="val 7605"/>
+            </a:avLst>
+          </a:prstGeom>
+          <a:solidFill>
+            <a:schemeClr val="bg2"/>
+          </a:solidFill>
+          <a:ln w="28575">
+            <a:solidFill>
+              <a:schemeClr val="tx1"/>
+            </a:solidFill>
+          </a:ln>
+        </p:spPr>
+        <p:style>
+          <a:lnRef idx="2">
+            <a:schemeClr val="accent1">
+              <a:shade val="15000"/>
+            </a:schemeClr>
+          </a:lnRef>
+          <a:fillRef idx="1">
+            <a:schemeClr val="accent1"/>
+          </a:fillRef>
+          <a:effectRef idx="0">
+            <a:schemeClr val="accent1"/>
+          </a:effectRef>
+          <a:fontRef idx="minor">
+            <a:schemeClr val="lt1"/>
+          </a:fontRef>
+        </p:style>
+        <p:txBody>
+          <a:bodyPr rtlCol="0" anchor="ctr"/>
+          <a:lstStyle/>
+          <a:p>
+            <a:pPr algn="ctr"/>
+            <a:endParaRPr lang="en-US"/>
+          </a:p>
+        </p:txBody>
+      </p:sp>
+      <p:sp>
+        <p:nvSpPr>
+          <p:cNvPr id="10" name="TextBox 9">
+            <a:extLst>
+              <a:ext uri="{FF2B5EF4-FFF2-40B4-BE49-F238E27FC236}">
+                <a16:creationId xmlns:a16="http://schemas.microsoft.com/office/drawing/2014/main" id="{6CBD25E8-3F82-1984-EDD3-82AF55CCDE0A}"/>
+              </a:ext>
+            </a:extLst>
+          </p:cNvPr>
+          <p:cNvSpPr txBox="1"/>
+          <p:nvPr/>
+        </p:nvSpPr>
+        <p:spPr>
+          <a:xfrm>
+            <a:off x="59403" y="1544177"/>
+            <a:ext cx="1499811" cy="707886"/>
+          </a:xfrm>
+          <a:prstGeom prst="rect">
+            <a:avLst/>
+          </a:prstGeom>
+          <a:noFill/>
+        </p:spPr>
+        <p:txBody>
+          <a:bodyPr wrap="square" rtlCol="0">
+            <a:spAutoFit/>
+          </a:bodyPr>
+          <a:lstStyle/>
+          <a:p>
+            <a:r>
+              <a:rPr lang="en-US" sz="4000" b="1" dirty="0">
+                <a:latin typeface="Arial" charset="0"/>
+                <a:ea typeface="Arial" charset="0"/>
+                <a:cs typeface="Arial" charset="0"/>
+              </a:rPr>
+              <a:t>75¢</a:t>
+            </a:r>
+          </a:p>
+        </p:txBody>
+      </p:sp>
+      <p:sp>
+        <p:nvSpPr>
+          <p:cNvPr id="11" name="Rectangle 10">
+            <a:extLst>
+              <a:ext uri="{FF2B5EF4-FFF2-40B4-BE49-F238E27FC236}">
+                <a16:creationId xmlns:a16="http://schemas.microsoft.com/office/drawing/2014/main" id="{2E0B9B2A-F18E-80F0-C72F-551A68E5F979}"/>
+              </a:ext>
+            </a:extLst>
+          </p:cNvPr>
+          <p:cNvSpPr/>
+          <p:nvPr/>
+        </p:nvSpPr>
+        <p:spPr>
+          <a:xfrm rot="2703669">
+            <a:off x="668752" y="685155"/>
+            <a:ext cx="962052" cy="915689"/>
+          </a:xfrm>
+          <a:prstGeom prst="rect">
+            <a:avLst/>
+          </a:prstGeom>
+          <a:solidFill>
+            <a:schemeClr val="bg1"/>
+          </a:solidFill>
+          <a:ln>
+            <a:solidFill>
+              <a:schemeClr val="tx1"/>
+            </a:solidFill>
+          </a:ln>
+        </p:spPr>
+        <p:style>
+          <a:lnRef idx="2">
+            <a:schemeClr val="accent1">
+              <a:shade val="50000"/>
+            </a:schemeClr>
+          </a:lnRef>
+          <a:fillRef idx="1">
+            <a:schemeClr val="accent1"/>
+          </a:fillRef>
+          <a:effectRef idx="0">
+            <a:schemeClr val="accent1"/>
+          </a:effectRef>
+          <a:fontRef idx="minor">
+            <a:schemeClr val="lt1"/>
+          </a:fontRef>
+        </p:style>
+        <p:txBody>
+          <a:bodyPr rtlCol="0" anchor="ctr"/>
+          <a:lstStyle/>
+          <a:p>
+            <a:pPr algn="ctr"/>
+            <a:endParaRPr lang="en-US" sz="471"/>
+          </a:p>
+        </p:txBody>
+      </p:sp>
+      <p:sp>
+        <p:nvSpPr>
+          <p:cNvPr id="12" name="TextBox 11">
+            <a:extLst>
+              <a:ext uri="{FF2B5EF4-FFF2-40B4-BE49-F238E27FC236}">
+                <a16:creationId xmlns:a16="http://schemas.microsoft.com/office/drawing/2014/main" id="{BDDAAD84-550C-52CD-A270-E25E8640EEB4}"/>
+              </a:ext>
+            </a:extLst>
+          </p:cNvPr>
+          <p:cNvSpPr txBox="1"/>
+          <p:nvPr/>
+        </p:nvSpPr>
+        <p:spPr>
+          <a:xfrm>
+            <a:off x="485914" y="818366"/>
+            <a:ext cx="1314172" cy="646331"/>
+          </a:xfrm>
+          <a:prstGeom prst="rect">
+            <a:avLst/>
+          </a:prstGeom>
+          <a:noFill/>
+        </p:spPr>
+        <p:txBody>
+          <a:bodyPr wrap="square" rtlCol="0">
+            <a:spAutoFit/>
+          </a:bodyPr>
+          <a:lstStyle/>
+          <a:p>
+            <a:pPr algn="ctr"/>
+            <a:r>
+              <a:rPr lang="en-US" sz="3538" b="1" dirty="0">
+                <a:latin typeface="Arial" charset="0"/>
+                <a:ea typeface="Arial" charset="0"/>
+                <a:cs typeface="Arial" charset="0"/>
+              </a:rPr>
+              <a:t>75</a:t>
+            </a:r>
+            <a:r>
+              <a:rPr lang="en-US" sz="3600" b="1" dirty="0">
+                <a:latin typeface="Arial" charset="0"/>
+                <a:ea typeface="Arial" charset="0"/>
+                <a:cs typeface="Arial" charset="0"/>
+              </a:rPr>
+              <a:t>¢</a:t>
+            </a:r>
+            <a:endParaRPr lang="en-US" sz="3538" b="1" dirty="0">
+              <a:latin typeface="Arial" charset="0"/>
+              <a:ea typeface="Arial" charset="0"/>
+              <a:cs typeface="Arial" charset="0"/>
+            </a:endParaRPr>
+          </a:p>
+        </p:txBody>
+      </p:sp>
+      <p:sp>
+        <p:nvSpPr>
+          <p:cNvPr id="2" name="TextBox 1">
+            <a:extLst>
+              <a:ext uri="{FF2B5EF4-FFF2-40B4-BE49-F238E27FC236}">
+                <a16:creationId xmlns:a16="http://schemas.microsoft.com/office/drawing/2014/main" id="{D99A2DD5-6F00-EB56-7165-F135C19827D3}"/>
+              </a:ext>
+            </a:extLst>
+          </p:cNvPr>
+          <p:cNvSpPr txBox="1"/>
+          <p:nvPr/>
+        </p:nvSpPr>
+        <p:spPr>
+          <a:xfrm>
+            <a:off x="1226194" y="0"/>
+            <a:ext cx="1217487" cy="707886"/>
+          </a:xfrm>
+          <a:prstGeom prst="rect">
+            <a:avLst/>
+          </a:prstGeom>
+          <a:noFill/>
+        </p:spPr>
+        <p:txBody>
+          <a:bodyPr wrap="square" rtlCol="0">
+            <a:spAutoFit/>
+          </a:bodyPr>
+          <a:lstStyle/>
+          <a:p>
+            <a:r>
+              <a:rPr lang="en-US" sz="4000" b="1">
+                <a:latin typeface="Arial" charset="0"/>
+                <a:ea typeface="Arial" charset="0"/>
+                <a:cs typeface="Arial" charset="0"/>
+              </a:rPr>
+              <a:t>75¢</a:t>
+            </a:r>
+            <a:endParaRPr lang="en-US" sz="4000" b="1" dirty="0">
+              <a:latin typeface="Arial" charset="0"/>
+              <a:ea typeface="Arial" charset="0"/>
+              <a:cs typeface="Arial" charset="0"/>
+            </a:endParaRPr>
+          </a:p>
+        </p:txBody>
+      </p:sp>
+    </p:spTree>
+    <p:extLst>
+      <p:ext uri="{BB962C8B-B14F-4D97-AF65-F5344CB8AC3E}">
+        <p14:creationId xmlns:p14="http://schemas.microsoft.com/office/powerpoint/2010/main" val="106447409"/>
+      </p:ext>
+    </p:extLst>
+  </p:cSld>
+  <p:clrMapOvr>
+    <a:masterClrMapping/>
+  </p:clrMapOvr>
+  <p:transition spd="med"/>
+</p:sld>
+</file>
+
+<file path=ppt/slides/slide12.xml><?xml version="1.0" encoding="utf-8"?>
+<p:sld xmlns:a="http://schemas.openxmlformats.org/drawingml/2006/main" xmlns:r="http://schemas.openxmlformats.org/officeDocument/2006/relationships" xmlns:p="http://schemas.openxmlformats.org/presentationml/2006/main">
+  <p:cSld>
+    <p:spTree>
+      <p:nvGrpSpPr>
+        <p:cNvPr id="1" name="">
+          <a:extLst>
+            <a:ext uri="{FF2B5EF4-FFF2-40B4-BE49-F238E27FC236}">
               <a16:creationId xmlns:a16="http://schemas.microsoft.com/office/drawing/2014/main" id="{958CB3FE-B09D-1485-E331-4D4795534CBF}"/>
             </a:ext>
           </a:extLst>
@@ -3747,7 +4422,7 @@
 </p:sld>
 </file>
 
-<file path=ppt/slides/slide11.xml><?xml version="1.0" encoding="utf-8"?>
+<file path=ppt/slides/slide13.xml><?xml version="1.0" encoding="utf-8"?>
 <p:sld xmlns:a="http://schemas.openxmlformats.org/drawingml/2006/main" xmlns:r="http://schemas.openxmlformats.org/officeDocument/2006/relationships" xmlns:p="http://schemas.openxmlformats.org/presentationml/2006/main">
   <p:cSld>
     <p:spTree>
@@ -4081,7 +4756,7 @@
 </p:sld>
 </file>
 
-<file path=ppt/slides/slide12.xml><?xml version="1.0" encoding="utf-8"?>
+<file path=ppt/slides/slide14.xml><?xml version="1.0" encoding="utf-8"?>
 <p:sld xmlns:a="http://schemas.openxmlformats.org/drawingml/2006/main" xmlns:r="http://schemas.openxmlformats.org/officeDocument/2006/relationships" xmlns:p="http://schemas.openxmlformats.org/presentationml/2006/main">
   <p:cSld>
     <p:spTree>
@@ -4402,7 +5077,7 @@
 </p:sld>
 </file>
 
-<file path=ppt/slides/slide13.xml><?xml version="1.0" encoding="utf-8"?>
+<file path=ppt/slides/slide15.xml><?xml version="1.0" encoding="utf-8"?>
 <p:sld xmlns:a="http://schemas.openxmlformats.org/drawingml/2006/main" xmlns:r="http://schemas.openxmlformats.org/officeDocument/2006/relationships" xmlns:p="http://schemas.openxmlformats.org/presentationml/2006/main">
   <p:cSld>
     <p:spTree>
@@ -5643,6 +6318,340 @@
         <p:cNvPr id="1" name="">
           <a:extLst>
             <a:ext uri="{FF2B5EF4-FFF2-40B4-BE49-F238E27FC236}">
+              <a16:creationId xmlns:a16="http://schemas.microsoft.com/office/drawing/2014/main" id="{F5081DF8-E407-7808-F272-E28B0028830F}"/>
+            </a:ext>
+          </a:extLst>
+        </p:cNvPr>
+        <p:cNvGrpSpPr/>
+        <p:nvPr/>
+      </p:nvGrpSpPr>
+      <p:grpSpPr>
+        <a:xfrm>
+          <a:off x="0" y="0"/>
+          <a:ext cx="0" cy="0"/>
+          <a:chOff x="0" y="0"/>
+          <a:chExt cx="0" cy="0"/>
+        </a:xfrm>
+      </p:grpSpPr>
+      <p:sp>
+        <p:nvSpPr>
+          <p:cNvPr id="8" name="Rounded Rectangle 7">
+            <a:extLst>
+              <a:ext uri="{FF2B5EF4-FFF2-40B4-BE49-F238E27FC236}">
+                <a16:creationId xmlns:a16="http://schemas.microsoft.com/office/drawing/2014/main" id="{CFE8646D-2DDF-1F8F-2327-508A38C1DDFF}"/>
+              </a:ext>
+            </a:extLst>
+          </p:cNvPr>
+          <p:cNvSpPr/>
+          <p:nvPr/>
+        </p:nvSpPr>
+        <p:spPr>
+          <a:xfrm>
+            <a:off x="6777" y="0"/>
+            <a:ext cx="2286001" cy="2286000"/>
+          </a:xfrm>
+          <a:prstGeom prst="roundRect">
+            <a:avLst>
+              <a:gd name="adj" fmla="val 640"/>
+            </a:avLst>
+          </a:prstGeom>
+          <a:solidFill>
+            <a:schemeClr val="bg1"/>
+          </a:solidFill>
+          <a:ln w="28575">
+            <a:solidFill>
+              <a:schemeClr val="tx1"/>
+            </a:solidFill>
+          </a:ln>
+        </p:spPr>
+        <p:style>
+          <a:lnRef idx="2">
+            <a:schemeClr val="accent1">
+              <a:shade val="50000"/>
+            </a:schemeClr>
+          </a:lnRef>
+          <a:fillRef idx="1">
+            <a:schemeClr val="accent1"/>
+          </a:fillRef>
+          <a:effectRef idx="0">
+            <a:schemeClr val="accent1"/>
+          </a:effectRef>
+          <a:fontRef idx="minor">
+            <a:schemeClr val="lt1"/>
+          </a:fontRef>
+        </p:style>
+        <p:txBody>
+          <a:bodyPr rtlCol="0" anchor="ctr"/>
+          <a:lstStyle/>
+          <a:p>
+            <a:pPr algn="ctr"/>
+            <a:endParaRPr lang="en-US" sz="471" dirty="0"/>
+          </a:p>
+        </p:txBody>
+      </p:sp>
+      <p:sp>
+        <p:nvSpPr>
+          <p:cNvPr id="5" name="Rounded Rectangle 4">
+            <a:extLst>
+              <a:ext uri="{FF2B5EF4-FFF2-40B4-BE49-F238E27FC236}">
+                <a16:creationId xmlns:a16="http://schemas.microsoft.com/office/drawing/2014/main" id="{B26C48AC-CE4B-3998-0679-3E4051136582}"/>
+              </a:ext>
+            </a:extLst>
+          </p:cNvPr>
+          <p:cNvSpPr/>
+          <p:nvPr/>
+        </p:nvSpPr>
+        <p:spPr>
+          <a:xfrm>
+            <a:off x="65887" y="59108"/>
+            <a:ext cx="2167781" cy="2167781"/>
+          </a:xfrm>
+          <a:prstGeom prst="roundRect">
+            <a:avLst>
+              <a:gd name="adj" fmla="val 7605"/>
+            </a:avLst>
+          </a:prstGeom>
+          <a:solidFill>
+            <a:schemeClr val="bg2"/>
+          </a:solidFill>
+          <a:ln w="28575">
+            <a:solidFill>
+              <a:schemeClr val="tx1"/>
+            </a:solidFill>
+          </a:ln>
+        </p:spPr>
+        <p:style>
+          <a:lnRef idx="2">
+            <a:schemeClr val="accent1">
+              <a:shade val="15000"/>
+            </a:schemeClr>
+          </a:lnRef>
+          <a:fillRef idx="1">
+            <a:schemeClr val="accent1"/>
+          </a:fillRef>
+          <a:effectRef idx="0">
+            <a:schemeClr val="accent1"/>
+          </a:effectRef>
+          <a:fontRef idx="minor">
+            <a:schemeClr val="lt1"/>
+          </a:fontRef>
+        </p:style>
+        <p:txBody>
+          <a:bodyPr rtlCol="0" anchor="ctr"/>
+          <a:lstStyle/>
+          <a:p>
+            <a:pPr algn="ctr"/>
+            <a:endParaRPr lang="en-US"/>
+          </a:p>
+        </p:txBody>
+      </p:sp>
+      <p:sp>
+        <p:nvSpPr>
+          <p:cNvPr id="10" name="TextBox 9">
+            <a:extLst>
+              <a:ext uri="{FF2B5EF4-FFF2-40B4-BE49-F238E27FC236}">
+                <a16:creationId xmlns:a16="http://schemas.microsoft.com/office/drawing/2014/main" id="{858BE56C-1CB4-BE85-FBF8-D4B09EBAE002}"/>
+              </a:ext>
+            </a:extLst>
+          </p:cNvPr>
+          <p:cNvSpPr txBox="1"/>
+          <p:nvPr/>
+        </p:nvSpPr>
+        <p:spPr>
+          <a:xfrm>
+            <a:off x="59403" y="1544177"/>
+            <a:ext cx="1499811" cy="707886"/>
+          </a:xfrm>
+          <a:prstGeom prst="rect">
+            <a:avLst/>
+          </a:prstGeom>
+          <a:noFill/>
+        </p:spPr>
+        <p:txBody>
+          <a:bodyPr wrap="square" rtlCol="0">
+            <a:spAutoFit/>
+          </a:bodyPr>
+          <a:lstStyle/>
+          <a:p>
+            <a:r>
+              <a:rPr lang="en-US" sz="4000" b="1" dirty="0">
+                <a:latin typeface="Arial" charset="0"/>
+                <a:ea typeface="Arial" charset="0"/>
+                <a:cs typeface="Arial" charset="0"/>
+              </a:rPr>
+              <a:t>25¢</a:t>
+            </a:r>
+          </a:p>
+        </p:txBody>
+      </p:sp>
+      <p:sp>
+        <p:nvSpPr>
+          <p:cNvPr id="11" name="Rectangle 10">
+            <a:extLst>
+              <a:ext uri="{FF2B5EF4-FFF2-40B4-BE49-F238E27FC236}">
+                <a16:creationId xmlns:a16="http://schemas.microsoft.com/office/drawing/2014/main" id="{5F44EC1A-D87A-88B9-C921-2EAB8ECD4B45}"/>
+              </a:ext>
+            </a:extLst>
+          </p:cNvPr>
+          <p:cNvSpPr/>
+          <p:nvPr/>
+        </p:nvSpPr>
+        <p:spPr>
+          <a:xfrm rot="2703669">
+            <a:off x="668752" y="685155"/>
+            <a:ext cx="962052" cy="915689"/>
+          </a:xfrm>
+          <a:prstGeom prst="rect">
+            <a:avLst/>
+          </a:prstGeom>
+          <a:solidFill>
+            <a:schemeClr val="bg1"/>
+          </a:solidFill>
+          <a:ln>
+            <a:solidFill>
+              <a:schemeClr val="tx1"/>
+            </a:solidFill>
+          </a:ln>
+        </p:spPr>
+        <p:style>
+          <a:lnRef idx="2">
+            <a:schemeClr val="accent1">
+              <a:shade val="50000"/>
+            </a:schemeClr>
+          </a:lnRef>
+          <a:fillRef idx="1">
+            <a:schemeClr val="accent1"/>
+          </a:fillRef>
+          <a:effectRef idx="0">
+            <a:schemeClr val="accent1"/>
+          </a:effectRef>
+          <a:fontRef idx="minor">
+            <a:schemeClr val="lt1"/>
+          </a:fontRef>
+        </p:style>
+        <p:txBody>
+          <a:bodyPr rtlCol="0" anchor="ctr"/>
+          <a:lstStyle/>
+          <a:p>
+            <a:pPr algn="ctr"/>
+            <a:endParaRPr lang="en-US" sz="471"/>
+          </a:p>
+        </p:txBody>
+      </p:sp>
+      <p:sp>
+        <p:nvSpPr>
+          <p:cNvPr id="12" name="TextBox 11">
+            <a:extLst>
+              <a:ext uri="{FF2B5EF4-FFF2-40B4-BE49-F238E27FC236}">
+                <a16:creationId xmlns:a16="http://schemas.microsoft.com/office/drawing/2014/main" id="{1AA7F0B5-382E-7DD2-3145-58E364122D28}"/>
+              </a:ext>
+            </a:extLst>
+          </p:cNvPr>
+          <p:cNvSpPr txBox="1"/>
+          <p:nvPr/>
+        </p:nvSpPr>
+        <p:spPr>
+          <a:xfrm>
+            <a:off x="485914" y="818366"/>
+            <a:ext cx="1314172" cy="646331"/>
+          </a:xfrm>
+          <a:prstGeom prst="rect">
+            <a:avLst/>
+          </a:prstGeom>
+          <a:noFill/>
+        </p:spPr>
+        <p:txBody>
+          <a:bodyPr wrap="square" rtlCol="0">
+            <a:spAutoFit/>
+          </a:bodyPr>
+          <a:lstStyle/>
+          <a:p>
+            <a:pPr algn="ctr"/>
+            <a:r>
+              <a:rPr lang="en-US" sz="3538" b="1" dirty="0">
+                <a:latin typeface="Arial" charset="0"/>
+                <a:ea typeface="Arial" charset="0"/>
+                <a:cs typeface="Arial" charset="0"/>
+              </a:rPr>
+              <a:t>25</a:t>
+            </a:r>
+            <a:r>
+              <a:rPr lang="en-US" sz="3600" b="1" dirty="0">
+                <a:latin typeface="Arial" charset="0"/>
+                <a:ea typeface="Arial" charset="0"/>
+                <a:cs typeface="Arial" charset="0"/>
+              </a:rPr>
+              <a:t>¢</a:t>
+            </a:r>
+            <a:endParaRPr lang="en-US" sz="3538" b="1" dirty="0">
+              <a:latin typeface="Arial" charset="0"/>
+              <a:ea typeface="Arial" charset="0"/>
+              <a:cs typeface="Arial" charset="0"/>
+            </a:endParaRPr>
+          </a:p>
+        </p:txBody>
+      </p:sp>
+      <p:sp>
+        <p:nvSpPr>
+          <p:cNvPr id="2" name="TextBox 1">
+            <a:extLst>
+              <a:ext uri="{FF2B5EF4-FFF2-40B4-BE49-F238E27FC236}">
+                <a16:creationId xmlns:a16="http://schemas.microsoft.com/office/drawing/2014/main" id="{0B040960-BD2D-6082-2E57-FB13707C7EC6}"/>
+              </a:ext>
+            </a:extLst>
+          </p:cNvPr>
+          <p:cNvSpPr txBox="1"/>
+          <p:nvPr/>
+        </p:nvSpPr>
+        <p:spPr>
+          <a:xfrm>
+            <a:off x="1226194" y="0"/>
+            <a:ext cx="1217487" cy="707886"/>
+          </a:xfrm>
+          <a:prstGeom prst="rect">
+            <a:avLst/>
+          </a:prstGeom>
+          <a:noFill/>
+        </p:spPr>
+        <p:txBody>
+          <a:bodyPr wrap="square" rtlCol="0">
+            <a:spAutoFit/>
+          </a:bodyPr>
+          <a:lstStyle/>
+          <a:p>
+            <a:r>
+              <a:rPr lang="en-US" sz="4000" b="1" dirty="0">
+                <a:latin typeface="Arial" charset="0"/>
+                <a:ea typeface="Arial" charset="0"/>
+                <a:cs typeface="Arial" charset="0"/>
+              </a:rPr>
+              <a:t>25¢</a:t>
+            </a:r>
+          </a:p>
+        </p:txBody>
+      </p:sp>
+    </p:spTree>
+    <p:extLst>
+      <p:ext uri="{BB962C8B-B14F-4D97-AF65-F5344CB8AC3E}">
+        <p14:creationId xmlns:p14="http://schemas.microsoft.com/office/powerpoint/2010/main" val="3115949235"/>
+      </p:ext>
+    </p:extLst>
+  </p:cSld>
+  <p:clrMapOvr>
+    <a:masterClrMapping/>
+  </p:clrMapOvr>
+  <p:transition spd="med"/>
+</p:sld>
+</file>
+
+<file path=ppt/slides/slide6.xml><?xml version="1.0" encoding="utf-8"?>
+<p:sld xmlns:a="http://schemas.openxmlformats.org/drawingml/2006/main" xmlns:r="http://schemas.openxmlformats.org/officeDocument/2006/relationships" xmlns:p="http://schemas.openxmlformats.org/presentationml/2006/main">
+  <p:cSld>
+    <p:spTree>
+      <p:nvGrpSpPr>
+        <p:cNvPr id="1" name="">
+          <a:extLst>
+            <a:ext uri="{FF2B5EF4-FFF2-40B4-BE49-F238E27FC236}">
               <a16:creationId xmlns:a16="http://schemas.microsoft.com/office/drawing/2014/main" id="{B43430B5-362F-E5BE-E05F-28746C01A49B}"/>
             </a:ext>
           </a:extLst>
@@ -5969,7 +6978,7 @@
 </p:sld>
 </file>
 
-<file path=ppt/slides/slide6.xml><?xml version="1.0" encoding="utf-8"?>
+<file path=ppt/slides/slide7.xml><?xml version="1.0" encoding="utf-8"?>
 <p:sld xmlns:a="http://schemas.openxmlformats.org/drawingml/2006/main" xmlns:r="http://schemas.openxmlformats.org/officeDocument/2006/relationships" xmlns:p="http://schemas.openxmlformats.org/presentationml/2006/main">
   <p:cSld>
     <p:spTree>
@@ -6303,7 +7312,7 @@
 </p:sld>
 </file>
 
-<file path=ppt/slides/slide7.xml><?xml version="1.0" encoding="utf-8"?>
+<file path=ppt/slides/slide8.xml><?xml version="1.0" encoding="utf-8"?>
 <p:sld xmlns:a="http://schemas.openxmlformats.org/drawingml/2006/main" xmlns:r="http://schemas.openxmlformats.org/officeDocument/2006/relationships" xmlns:p="http://schemas.openxmlformats.org/presentationml/2006/main">
   <p:cSld>
     <p:spTree>
@@ -6637,7 +7646,7 @@
 </p:sld>
 </file>
 
-<file path=ppt/slides/slide8.xml><?xml version="1.0" encoding="utf-8"?>
+<file path=ppt/slides/slide9.xml><?xml version="1.0" encoding="utf-8"?>
 <p:sld xmlns:a="http://schemas.openxmlformats.org/drawingml/2006/main" xmlns:r="http://schemas.openxmlformats.org/officeDocument/2006/relationships" xmlns:p="http://schemas.openxmlformats.org/presentationml/2006/main">
   <p:cSld>
     <p:spTree>
@@ -6961,340 +7970,6 @@
     <p:extLst>
       <p:ext uri="{BB962C8B-B14F-4D97-AF65-F5344CB8AC3E}">
         <p14:creationId xmlns:p14="http://schemas.microsoft.com/office/powerpoint/2010/main" val="1988118923"/>
-      </p:ext>
-    </p:extLst>
-  </p:cSld>
-  <p:clrMapOvr>
-    <a:masterClrMapping/>
-  </p:clrMapOvr>
-  <p:transition spd="med"/>
-</p:sld>
-</file>
-
-<file path=ppt/slides/slide9.xml><?xml version="1.0" encoding="utf-8"?>
-<p:sld xmlns:a="http://schemas.openxmlformats.org/drawingml/2006/main" xmlns:r="http://schemas.openxmlformats.org/officeDocument/2006/relationships" xmlns:p="http://schemas.openxmlformats.org/presentationml/2006/main">
-  <p:cSld>
-    <p:spTree>
-      <p:nvGrpSpPr>
-        <p:cNvPr id="1" name="">
-          <a:extLst>
-            <a:ext uri="{FF2B5EF4-FFF2-40B4-BE49-F238E27FC236}">
-              <a16:creationId xmlns:a16="http://schemas.microsoft.com/office/drawing/2014/main" id="{1274BBB8-7970-4B64-3BDE-97204AB32689}"/>
-            </a:ext>
-          </a:extLst>
-        </p:cNvPr>
-        <p:cNvGrpSpPr/>
-        <p:nvPr/>
-      </p:nvGrpSpPr>
-      <p:grpSpPr>
-        <a:xfrm>
-          <a:off x="0" y="0"/>
-          <a:ext cx="0" cy="0"/>
-          <a:chOff x="0" y="0"/>
-          <a:chExt cx="0" cy="0"/>
-        </a:xfrm>
-      </p:grpSpPr>
-      <p:sp>
-        <p:nvSpPr>
-          <p:cNvPr id="8" name="Rounded Rectangle 7">
-            <a:extLst>
-              <a:ext uri="{FF2B5EF4-FFF2-40B4-BE49-F238E27FC236}">
-                <a16:creationId xmlns:a16="http://schemas.microsoft.com/office/drawing/2014/main" id="{DF42EDC6-FAAF-C800-3DC2-DF4AF38F972C}"/>
-              </a:ext>
-            </a:extLst>
-          </p:cNvPr>
-          <p:cNvSpPr/>
-          <p:nvPr/>
-        </p:nvSpPr>
-        <p:spPr>
-          <a:xfrm>
-            <a:off x="6777" y="0"/>
-            <a:ext cx="2286001" cy="2286000"/>
-          </a:xfrm>
-          <a:prstGeom prst="roundRect">
-            <a:avLst>
-              <a:gd name="adj" fmla="val 640"/>
-            </a:avLst>
-          </a:prstGeom>
-          <a:solidFill>
-            <a:schemeClr val="bg1"/>
-          </a:solidFill>
-          <a:ln w="28575">
-            <a:solidFill>
-              <a:schemeClr val="tx1"/>
-            </a:solidFill>
-          </a:ln>
-        </p:spPr>
-        <p:style>
-          <a:lnRef idx="2">
-            <a:schemeClr val="accent1">
-              <a:shade val="50000"/>
-            </a:schemeClr>
-          </a:lnRef>
-          <a:fillRef idx="1">
-            <a:schemeClr val="accent1"/>
-          </a:fillRef>
-          <a:effectRef idx="0">
-            <a:schemeClr val="accent1"/>
-          </a:effectRef>
-          <a:fontRef idx="minor">
-            <a:schemeClr val="lt1"/>
-          </a:fontRef>
-        </p:style>
-        <p:txBody>
-          <a:bodyPr rtlCol="0" anchor="ctr"/>
-          <a:lstStyle/>
-          <a:p>
-            <a:pPr algn="ctr"/>
-            <a:endParaRPr lang="en-US" sz="471" dirty="0"/>
-          </a:p>
-        </p:txBody>
-      </p:sp>
-      <p:sp>
-        <p:nvSpPr>
-          <p:cNvPr id="5" name="Rounded Rectangle 4">
-            <a:extLst>
-              <a:ext uri="{FF2B5EF4-FFF2-40B4-BE49-F238E27FC236}">
-                <a16:creationId xmlns:a16="http://schemas.microsoft.com/office/drawing/2014/main" id="{43987BB0-B799-CEF1-3E9D-D81D60CB13B7}"/>
-              </a:ext>
-            </a:extLst>
-          </p:cNvPr>
-          <p:cNvSpPr/>
-          <p:nvPr/>
-        </p:nvSpPr>
-        <p:spPr>
-          <a:xfrm>
-            <a:off x="65887" y="59108"/>
-            <a:ext cx="2167781" cy="2167781"/>
-          </a:xfrm>
-          <a:prstGeom prst="roundRect">
-            <a:avLst>
-              <a:gd name="adj" fmla="val 7605"/>
-            </a:avLst>
-          </a:prstGeom>
-          <a:solidFill>
-            <a:schemeClr val="bg2"/>
-          </a:solidFill>
-          <a:ln w="28575">
-            <a:solidFill>
-              <a:schemeClr val="tx1"/>
-            </a:solidFill>
-          </a:ln>
-        </p:spPr>
-        <p:style>
-          <a:lnRef idx="2">
-            <a:schemeClr val="accent1">
-              <a:shade val="15000"/>
-            </a:schemeClr>
-          </a:lnRef>
-          <a:fillRef idx="1">
-            <a:schemeClr val="accent1"/>
-          </a:fillRef>
-          <a:effectRef idx="0">
-            <a:schemeClr val="accent1"/>
-          </a:effectRef>
-          <a:fontRef idx="minor">
-            <a:schemeClr val="lt1"/>
-          </a:fontRef>
-        </p:style>
-        <p:txBody>
-          <a:bodyPr rtlCol="0" anchor="ctr"/>
-          <a:lstStyle/>
-          <a:p>
-            <a:pPr algn="ctr"/>
-            <a:endParaRPr lang="en-US"/>
-          </a:p>
-        </p:txBody>
-      </p:sp>
-      <p:sp>
-        <p:nvSpPr>
-          <p:cNvPr id="10" name="TextBox 9">
-            <a:extLst>
-              <a:ext uri="{FF2B5EF4-FFF2-40B4-BE49-F238E27FC236}">
-                <a16:creationId xmlns:a16="http://schemas.microsoft.com/office/drawing/2014/main" id="{1141178D-7095-866D-DF95-037AAF990B48}"/>
-              </a:ext>
-            </a:extLst>
-          </p:cNvPr>
-          <p:cNvSpPr txBox="1"/>
-          <p:nvPr/>
-        </p:nvSpPr>
-        <p:spPr>
-          <a:xfrm>
-            <a:off x="59403" y="1544177"/>
-            <a:ext cx="1499811" cy="707886"/>
-          </a:xfrm>
-          <a:prstGeom prst="rect">
-            <a:avLst/>
-          </a:prstGeom>
-          <a:noFill/>
-        </p:spPr>
-        <p:txBody>
-          <a:bodyPr wrap="square" rtlCol="0">
-            <a:spAutoFit/>
-          </a:bodyPr>
-          <a:lstStyle/>
-          <a:p>
-            <a:r>
-              <a:rPr lang="en-US" sz="4000" b="1" dirty="0">
-                <a:latin typeface="Arial" charset="0"/>
-                <a:ea typeface="Arial" charset="0"/>
-                <a:cs typeface="Arial" charset="0"/>
-              </a:rPr>
-              <a:t>70¢</a:t>
-            </a:r>
-          </a:p>
-        </p:txBody>
-      </p:sp>
-      <p:sp>
-        <p:nvSpPr>
-          <p:cNvPr id="11" name="Rectangle 10">
-            <a:extLst>
-              <a:ext uri="{FF2B5EF4-FFF2-40B4-BE49-F238E27FC236}">
-                <a16:creationId xmlns:a16="http://schemas.microsoft.com/office/drawing/2014/main" id="{F1741C2E-2981-90C4-17C8-972E7B94BD93}"/>
-              </a:ext>
-            </a:extLst>
-          </p:cNvPr>
-          <p:cNvSpPr/>
-          <p:nvPr/>
-        </p:nvSpPr>
-        <p:spPr>
-          <a:xfrm rot="2703669">
-            <a:off x="668752" y="685155"/>
-            <a:ext cx="962052" cy="915689"/>
-          </a:xfrm>
-          <a:prstGeom prst="rect">
-            <a:avLst/>
-          </a:prstGeom>
-          <a:solidFill>
-            <a:schemeClr val="bg1"/>
-          </a:solidFill>
-          <a:ln>
-            <a:solidFill>
-              <a:schemeClr val="tx1"/>
-            </a:solidFill>
-          </a:ln>
-        </p:spPr>
-        <p:style>
-          <a:lnRef idx="2">
-            <a:schemeClr val="accent1">
-              <a:shade val="50000"/>
-            </a:schemeClr>
-          </a:lnRef>
-          <a:fillRef idx="1">
-            <a:schemeClr val="accent1"/>
-          </a:fillRef>
-          <a:effectRef idx="0">
-            <a:schemeClr val="accent1"/>
-          </a:effectRef>
-          <a:fontRef idx="minor">
-            <a:schemeClr val="lt1"/>
-          </a:fontRef>
-        </p:style>
-        <p:txBody>
-          <a:bodyPr rtlCol="0" anchor="ctr"/>
-          <a:lstStyle/>
-          <a:p>
-            <a:pPr algn="ctr"/>
-            <a:endParaRPr lang="en-US" sz="471"/>
-          </a:p>
-        </p:txBody>
-      </p:sp>
-      <p:sp>
-        <p:nvSpPr>
-          <p:cNvPr id="12" name="TextBox 11">
-            <a:extLst>
-              <a:ext uri="{FF2B5EF4-FFF2-40B4-BE49-F238E27FC236}">
-                <a16:creationId xmlns:a16="http://schemas.microsoft.com/office/drawing/2014/main" id="{5B85D8CD-C49C-28E7-B548-D05632FE3D44}"/>
-              </a:ext>
-            </a:extLst>
-          </p:cNvPr>
-          <p:cNvSpPr txBox="1"/>
-          <p:nvPr/>
-        </p:nvSpPr>
-        <p:spPr>
-          <a:xfrm>
-            <a:off x="485914" y="818366"/>
-            <a:ext cx="1314172" cy="646331"/>
-          </a:xfrm>
-          <a:prstGeom prst="rect">
-            <a:avLst/>
-          </a:prstGeom>
-          <a:noFill/>
-        </p:spPr>
-        <p:txBody>
-          <a:bodyPr wrap="square" rtlCol="0">
-            <a:spAutoFit/>
-          </a:bodyPr>
-          <a:lstStyle/>
-          <a:p>
-            <a:pPr algn="ctr"/>
-            <a:r>
-              <a:rPr lang="en-US" sz="3538" b="1" dirty="0">
-                <a:latin typeface="Arial" charset="0"/>
-                <a:ea typeface="Arial" charset="0"/>
-                <a:cs typeface="Arial" charset="0"/>
-              </a:rPr>
-              <a:t>70</a:t>
-            </a:r>
-            <a:r>
-              <a:rPr lang="en-US" sz="3600" b="1" dirty="0">
-                <a:latin typeface="Arial" charset="0"/>
-                <a:ea typeface="Arial" charset="0"/>
-                <a:cs typeface="Arial" charset="0"/>
-              </a:rPr>
-              <a:t>¢</a:t>
-            </a:r>
-            <a:endParaRPr lang="en-US" sz="3538" b="1" dirty="0">
-              <a:latin typeface="Arial" charset="0"/>
-              <a:ea typeface="Arial" charset="0"/>
-              <a:cs typeface="Arial" charset="0"/>
-            </a:endParaRPr>
-          </a:p>
-        </p:txBody>
-      </p:sp>
-      <p:sp>
-        <p:nvSpPr>
-          <p:cNvPr id="2" name="TextBox 1">
-            <a:extLst>
-              <a:ext uri="{FF2B5EF4-FFF2-40B4-BE49-F238E27FC236}">
-                <a16:creationId xmlns:a16="http://schemas.microsoft.com/office/drawing/2014/main" id="{31B68E59-ECE5-C2A3-BE9F-49AA446BF7F5}"/>
-              </a:ext>
-            </a:extLst>
-          </p:cNvPr>
-          <p:cNvSpPr txBox="1"/>
-          <p:nvPr/>
-        </p:nvSpPr>
-        <p:spPr>
-          <a:xfrm>
-            <a:off x="1226194" y="0"/>
-            <a:ext cx="1217487" cy="707886"/>
-          </a:xfrm>
-          <a:prstGeom prst="rect">
-            <a:avLst/>
-          </a:prstGeom>
-          <a:noFill/>
-        </p:spPr>
-        <p:txBody>
-          <a:bodyPr wrap="square" rtlCol="0">
-            <a:spAutoFit/>
-          </a:bodyPr>
-          <a:lstStyle/>
-          <a:p>
-            <a:r>
-              <a:rPr lang="en-US" sz="4000" b="1" dirty="0">
-                <a:latin typeface="Arial" charset="0"/>
-                <a:ea typeface="Arial" charset="0"/>
-                <a:cs typeface="Arial" charset="0"/>
-              </a:rPr>
-              <a:t>70¢</a:t>
-            </a:r>
-          </a:p>
-        </p:txBody>
-      </p:sp>
-    </p:spTree>
-    <p:extLst>
-      <p:ext uri="{BB962C8B-B14F-4D97-AF65-F5344CB8AC3E}">
-        <p14:creationId xmlns:p14="http://schemas.microsoft.com/office/powerpoint/2010/main" val="2369235828"/>
       </p:ext>
     </p:extLst>
   </p:cSld>
